--- a/outputs/produkte/mba/praesentationen/call-01-dranbleiben.pptx
+++ b/outputs/produkte/mba/praesentationen/call-01-dranbleiben.pptx
@@ -24,6 +24,8 @@
     <p:sldId id="272" r:id="rId24"/>
     <p:sldId id="273" r:id="rId25"/>
     <p:sldId id="274" r:id="rId26"/>
+    <p:sldId id="275" r:id="rId27"/>
+    <p:sldId id="276" r:id="rId28"/>
   </p:sldIdLst>
   <p:sldSz cx="9144000" cy="5143500" type="screen4x3"/>
   <p:notesSz cx="6858000" cy="9144000"/>
@@ -660,7 +662,7 @@
           <a:lstStyle/>
           <a:p>
             <a:r>
-              <a:t>Und damit sind wir beim zweiten Teil, denn Anerkennung allein bringt dich nicht weiter. Jetzt kommt die Konsistenz. Und mein Satz dazu: vier Wochen sind keine Challenge, vier Wochen sind die Mindestdosis. Vorher kannst du gar nicht beurteilen, ob etwas funktioniert.</a:t>
+              <a:t>Und bevor wir zum zweiten Teil kommen, muss ich noch etwas sagen, weil es sonst schief ankommt. Es gibt Phasen, in denen gar nichts geht. Wo du keine Kraft hast, wo privat etwas läuft, wo dein Business einfach steht, wochenlang. Und ich will, dass ihr das von mir hört und nicht von irgendeinem Coach im Internet: das gehört dazu. Das ist kein Rückschritt und es ist auch nicht dein Versagen. Ich hatte solche Phasen und ich werde wieder welche haben.</a:t>
             </a:r>
           </a:p>
         </p:txBody>
@@ -730,7 +732,7 @@
           <a:lstStyle/>
           <a:p>
             <a:r>
-              <a:t>Ich erzähl dir, was ich am häufigsten sehe. Und ich hab da ein Beispiel aus meiner Begleitung: eine Frau hat einen Monat lang jeden Tag gepostet. Die Reichweite ist deutlich hochgegangen, es kam richtig Bewegung rein, es hat funktioniert. Das ist der Beweis, dass Konstanz wirkt, und zwar schneller, als die meisten glauben. Und dann hat sie aufgehört, und ein paar Wochen später war alles wieder da, wo es vorher war.</a:t>
+              <a:t>Vier Sachen, die in so einer Phase gelten. Erstens: eine Pause ist keine verlorene Zeit, weil dein aufgebautes Konto bleibt. Dein Profil, dein Wissen, deine Leute, das verschwindet nicht in sechs Wochen. Zweitens, und das ist mir das wichtigste: Pause ist nicht aufhören. Aufhören heisst wegbleiben, ohne dass es jemand merkt. Drittens: sag es laut, ein Satz bei uns im Fragen-Bereich reicht, dann muss niemand raten und niemand denkt, du hättest es aufgegeben. Und viertens: wenn du wieder kannst, fängst du nicht bei null an. Du fängst da an, wo du aufgehört hast, und das ist ein grosser Unterschied.</a:t>
             </a:r>
           </a:p>
         </p:txBody>
@@ -800,7 +802,7 @@
           <a:lstStyle/>
           <a:p>
             <a:r>
-              <a:t>Und jetzt ganz wichtig, damit das nicht falsch ankommt: das ist kein Versagen. Es liegt nie an dir als Person, meistens ist einfach das System zu gross gebaut. Jeden Tag ein Beitrag neben Kindern ist kein Rhythmus, das ist ein Sprint. Und Sprints hält niemand über Monate durch. Nicht die Intensität entscheidet, sondern ob du es noch machst, wenn es langweilig geworden ist.</a:t>
+              <a:t>Und damit sind wir beim zweiten Teil, denn Anerkennung allein bringt dich nicht weiter. Jetzt kommt die Konsistenz. Und mein Satz dazu: vier Wochen sind keine Challenge, vier Wochen sind die Mindestdosis. Vorher kannst du gar nicht beurteilen, ob etwas funktioniert.</a:t>
             </a:r>
           </a:p>
         </p:txBody>
@@ -870,7 +872,7 @@
           <a:lstStyle/>
           <a:p>
             <a:r>
-              <a:t>Darum machen wir das heute anders. Du suchst dir eine Sache. Nicht drei, eine. Und die muss so klein sein, dass du sie auch an dem Tag noch schaffst, an dem alles schiefgeht. Und dann kriegt sie noch eine Notfall-Version, also die Mini-Ausgabe für genau diese Tage. Nicht als Ausrede, sondern damit die Kette nicht reisst.</a:t>
+              <a:t>Ich erzähl dir, was ich am häufigsten sehe. Und ich hab da ein Beispiel aus meiner Begleitung: eine Frau hat einen Monat lang jeden Tag gepostet. Die Reichweite ist deutlich hochgegangen, es kam richtig Bewegung rein, es hat funktioniert. Das ist der Beweis, dass Konstanz wirkt, und zwar schneller, als die meisten glauben. Und dann hat sie aufgehört, und ein paar Wochen später war alles wieder da, wo es vorher war.</a:t>
             </a:r>
           </a:p>
         </p:txBody>
@@ -940,7 +942,7 @@
           <a:lstStyle/>
           <a:p>
             <a:r>
-              <a:t>Ein paar Beispiele, damit du ein Gefühl kriegst. Links steht deine Sache, rechts die Notfall-Version. Jeden Tag eine Story wird zu einer einzigen Story mit dem Handy im Auto. Drei Beiträge die Woche werden zu einem, dafür fix am selben Tag. Und die Sonntagsplanung wird zu zehn Minuten, drei Zeilen, fertig. Du merkst: die Notfall-Version darf richtig klein sein. Sie muss nur stattfinden.</a:t>
+              <a:t>Und jetzt ganz wichtig, damit das nicht falsch ankommt: das ist kein Versagen. Es liegt nie an dir als Person, meistens ist einfach das System zu gross gebaut. Jeden Tag ein Beitrag neben Kindern ist kein Rhythmus, das ist ein Sprint. Und Sprints hält niemand über Monate durch. Nicht die Intensität entscheidet, sondern ob du es noch machst, wenn es langweilig geworden ist.</a:t>
             </a:r>
           </a:p>
         </p:txBody>
@@ -1010,7 +1012,7 @@
           <a:lstStyle/>
           <a:p>
             <a:r>
-              <a:t>Jetzt schreibst du zwei Zeilen auf: deine eine Sache für die nächsten vier Wochen und deine Notfall-Version für schlechte Tage. Danach sagt sie jede laut, und ich sag dir ehrlich, wenn ich sie zu gross finde. Frag dich beim Aufschreiben schon selber: und am Tag, an dem beide Kinder krank sind, schaff ich das dann noch?</a:t>
+              <a:t>Darum machen wir das heute anders. Du suchst dir eine Sache. Nicht drei, eine. Und die muss so klein sein, dass du sie auch an dem Tag noch schaffst, an dem alles schiefgeht. Und dann kriegt sie eine Notfall-Version. Und jetzt hör mir gut zu: die Notfall-Version ist kein Rutsch nach unten und keine schlechtere Variante. Sie ist deine Sache, nur kleiner. Wer die Notfall-Version macht, hat die Woche geschafft, Punkt.</a:t>
             </a:r>
           </a:p>
         </p:txBody>
@@ -1080,7 +1082,7 @@
           <a:lstStyle/>
           <a:p>
             <a:r>
-              <a:t>Deine Aufgabe ist einfach und trotzdem die schwerste, die ich dir dieses Jahr gebe. Du ziehst deine eine Sache vier Wochen durch, mit Notfall-Version wenn es sein muss. Und du schreibst jede Woche drei Zeilen bei uns in den Fragen-Bereich. Was du geschafft hast, ob mit Notfall-Version, und was passiert ist. Und da geht es ausdrücklich nicht ums Geld, sondern um alles andere: wer sich gemeldet hat, was du fertig gebaut hast, was leichter ging als letzte Woche.</a:t>
+              <a:t>Ein paar Beispiele, damit du ein Gefühl kriegst. Links steht deine Sache, rechts die Notfall-Version. Jeden Tag eine Story wird zu einer einzigen Story mit dem Handy im Auto. Drei Beiträge die Woche werden zu einem, dafür fix am selben Tag. Und die Sonntagsplanung wird zu zehn Minuten, drei Zeilen, fertig. Du merkst: die Notfall-Version darf richtig klein sein. Sie muss nur stattfinden.</a:t>
             </a:r>
           </a:p>
         </p:txBody>
@@ -1150,7 +1152,7 @@
           <a:lstStyle/>
           <a:p>
             <a:r>
-              <a:t>Und wenn eine Woche nicht klappt, dann schreibst du genau das rein. Nein ist eine völlig gültige Antwort, und dann schauen wir gemeinsam, ob deine Sache zu gross gebaut war, und machen sie kleiner. Dranbleiben heisst nämlich nicht lückenlos, es heisst zurückkommen. Aufhören ist das Einzige, was hier wirklich nicht funktioniert.</a:t>
+              <a:t>Jetzt schreibst du zwei Zeilen auf: deine eine Sache für die nächsten vier Wochen und deine Notfall-Version für schlechte Tage. Danach sagt sie jede laut, und ich sag dir ehrlich, wenn ich sie zu gross finde. Frag dich beim Aufschreiben schon selber: und am Tag, an dem beide Kinder krank sind, schaff ich das dann noch?</a:t>
             </a:r>
           </a:p>
         </p:txBody>
@@ -1220,7 +1222,7 @@
           <a:lstStyle/>
           <a:p>
             <a:r>
-              <a:t>Zum Schluss noch kurz, wie es weitergeht. Wir haben zwei Calls im Monat, einen zu einem Thema mit euren Fragen und einen nur für eure Fragen. Alles wird aufgezeichnet und liegt danach in der Academy, du verpasst also nichts, wenn ein Kind Fieber hat. Zwischendurch läuft der Austausch im Fragen-Bereich und ich bin dienstags und donnerstags drin. Und beim nächsten Themen-Call schauen wir zwei Sachen an: was aus deinen vier Wochen geworden ist, und dann nehmen wir uns dein Thema vor. Ich freu mich auf euch.</a:t>
+              <a:t>Deine Aufgabe ist einfach und trotzdem die schwerste, die ich dir dieses Jahr gebe. Du ziehst deine eine Sache vier Wochen durch, mit Notfall-Version wenn es sein muss. Und du schreibst jede Woche drei Zeilen bei uns in den Fragen-Bereich. Was du geschafft hast, ob mit Notfall-Version, und was passiert ist. Und da geht es ausdrücklich nicht ums Geld, sondern um alles andere: wer sich gemeldet hat, was du fertig gebaut hast, was leichter ging als letzte Woche.</a:t>
             </a:r>
           </a:p>
         </p:txBody>
@@ -1290,7 +1292,147 @@
           <a:lstStyle/>
           <a:p>
             <a:r>
-              <a:t>Kurz, was heute passiert, damit du weisst, worauf es hinausläuft. Wir machen eine Runde, dann rede ich einen Moment, danach arbeitest du selber, dann rede ich nochmal, und dann arbeitest du nochmal. Am Ende gehst du mit einer ganz konkreten Sache raus. Das ist mir wichtig, ich will keine Calls machen, nach denen man ein gutes Gefühl hat und am nächsten Tag nichts anders ist.</a:t>
+              <a:t>Kurz, was heute passiert, damit du weisst, worauf es hinausläuft. Wir machen eine Runde, dann rede ich einen Moment, danach arbeitest du selber, dann rede ich nochmal, und dann arbeitest du nochmal. Am Ende gehst du mit einer ganz konkreten Sache raus. Das ist mir wichtig, ich will keine Calls machen, nach denen man ein gutes Gefühl hat und am nächsten Tag nichts anders ist. Und eins sag ich gleich vorneweg, damit es keine falsche Erwartung gibt: es geht heute um Dranbleiben, aber es geht nicht um Vollgas. Wenn bei dir gerade wenig oder gar nichts geht, dann bist du hier genau richtig, denn genau dafür bauen wir das nachher passend.</a:t>
+            </a:r>
+          </a:p>
+        </p:txBody>
+      </p:sp>
+      <p:sp>
+        <p:nvSpPr>
+          <p:cNvPr id="4" name="Slide Number Placeholder 3"/>
+          <p:cNvSpPr>
+            <a:spLocks noGrp="1"/>
+          </p:cNvSpPr>
+          <p:nvPr>
+            <p:ph type="sldNum" idx="5" sz="quarter"/>
+          </p:nvPr>
+        </p:nvSpPr>
+        <p:spPr/>
+      </p:sp>
+    </p:spTree>
+  </p:cSld>
+  <p:clrMapOvr>
+    <a:masterClrMapping/>
+  </p:clrMapOvr>
+</p:notes>
+</file>
+
+<file path=ppt/notesSlides/notesSlide20.xml><?xml version="1.0" encoding="utf-8"?>
+<p:notes xmlns:a="http://schemas.openxmlformats.org/drawingml/2006/main" xmlns:p="http://schemas.openxmlformats.org/presentationml/2006/main" xmlns:r="http://schemas.openxmlformats.org/officeDocument/2006/relationships">
+  <p:cSld>
+    <p:spTree>
+      <p:nvGrpSpPr>
+        <p:cNvPr id="1" name=""/>
+        <p:cNvGrpSpPr/>
+        <p:nvPr/>
+      </p:nvGrpSpPr>
+      <p:grpSpPr>
+        <a:xfrm>
+          <a:off x="0" y="0"/>
+          <a:ext cx="0" cy="0"/>
+          <a:chOff x="0" y="0"/>
+          <a:chExt cx="0" cy="0"/>
+        </a:xfrm>
+      </p:grpSpPr>
+      <p:sp>
+        <p:nvSpPr>
+          <p:cNvPr id="2" name="Slide Image Placeholder 1"/>
+          <p:cNvSpPr>
+            <a:spLocks noGrp="1"/>
+          </p:cNvSpPr>
+          <p:nvPr>
+            <p:ph type="sldImg" idx="2"/>
+          </p:nvPr>
+        </p:nvSpPr>
+        <p:spPr/>
+      </p:sp>
+      <p:sp>
+        <p:nvSpPr>
+          <p:cNvPr id="3" name="Notes Placeholder 2"/>
+          <p:cNvSpPr>
+            <a:spLocks noGrp="1"/>
+          </p:cNvSpPr>
+          <p:nvPr>
+            <p:ph type="body" idx="3" sz="quarter"/>
+          </p:nvPr>
+        </p:nvSpPr>
+        <p:spPr/>
+        <p:txBody>
+          <a:bodyPr/>
+          <a:lstStyle/>
+          <a:p>
+            <a:r>
+              <a:t>Und wenn eine Woche nicht klappt, dann schreibst du genau das rein. Nein ist eine völlig gültige Antwort, und dann schauen wir gemeinsam, ob deine Sache zu gross gebaut war, und machen sie kleiner. Dranbleiben heisst nämlich nicht lückenlos, es heisst zurückkommen. Und wenn es länger dauert als eine Woche, dann ist das eine Pause, und Pause ist nicht aufhören. Aufhören heisst wegbleiben, ohne dass es jemand merkt — und genau das musst du hier nie machen.</a:t>
+            </a:r>
+          </a:p>
+        </p:txBody>
+      </p:sp>
+      <p:sp>
+        <p:nvSpPr>
+          <p:cNvPr id="4" name="Slide Number Placeholder 3"/>
+          <p:cNvSpPr>
+            <a:spLocks noGrp="1"/>
+          </p:cNvSpPr>
+          <p:nvPr>
+            <p:ph type="sldNum" idx="5" sz="quarter"/>
+          </p:nvPr>
+        </p:nvSpPr>
+        <p:spPr/>
+      </p:sp>
+    </p:spTree>
+  </p:cSld>
+  <p:clrMapOvr>
+    <a:masterClrMapping/>
+  </p:clrMapOvr>
+</p:notes>
+</file>
+
+<file path=ppt/notesSlides/notesSlide21.xml><?xml version="1.0" encoding="utf-8"?>
+<p:notes xmlns:a="http://schemas.openxmlformats.org/drawingml/2006/main" xmlns:p="http://schemas.openxmlformats.org/presentationml/2006/main" xmlns:r="http://schemas.openxmlformats.org/officeDocument/2006/relationships">
+  <p:cSld>
+    <p:spTree>
+      <p:nvGrpSpPr>
+        <p:cNvPr id="1" name=""/>
+        <p:cNvGrpSpPr/>
+        <p:nvPr/>
+      </p:nvGrpSpPr>
+      <p:grpSpPr>
+        <a:xfrm>
+          <a:off x="0" y="0"/>
+          <a:ext cx="0" cy="0"/>
+          <a:chOff x="0" y="0"/>
+          <a:chExt cx="0" cy="0"/>
+        </a:xfrm>
+      </p:grpSpPr>
+      <p:sp>
+        <p:nvSpPr>
+          <p:cNvPr id="2" name="Slide Image Placeholder 1"/>
+          <p:cNvSpPr>
+            <a:spLocks noGrp="1"/>
+          </p:cNvSpPr>
+          <p:nvPr>
+            <p:ph type="sldImg" idx="2"/>
+          </p:nvPr>
+        </p:nvSpPr>
+        <p:spPr/>
+      </p:sp>
+      <p:sp>
+        <p:nvSpPr>
+          <p:cNvPr id="3" name="Notes Placeholder 2"/>
+          <p:cNvSpPr>
+            <a:spLocks noGrp="1"/>
+          </p:cNvSpPr>
+          <p:nvPr>
+            <p:ph type="body" idx="3" sz="quarter"/>
+          </p:nvPr>
+        </p:nvSpPr>
+        <p:spPr/>
+        <p:txBody>
+          <a:bodyPr/>
+          <a:lstStyle/>
+          <a:p>
+            <a:r>
+              <a:t>Zum Schluss noch kurz, wie es weitergeht. Wir haben zwei Calls im Monat, einen zu einem Thema mit euren Fragen und einen nur für eure Fragen. Alles wird aufgezeichnet und liegt danach in der Academy, du verpasst also nichts, wenn ein Kind Fieber hat. Zwischendurch läuft der Austausch im Fragen-Bereich und ich bin dienstags und donnerstags drin. Und beim nächsten Themen-Call schauen wir zwei Sachen an: was aus deinen vier Wochen geworden ist, und dann nehmen wir uns dein Thema vor. Ich freu mich auf euch.</a:t>
             </a:r>
           </a:p>
         </p:txBody>
@@ -5463,8 +5605,8 @@
                 </a:solidFill>
                 <a:latin typeface="Georgia"/>
               </a:rPr>
-              <a:t>Vier Wochen sind
-keine Challenge.</a:t>
+              <a:t>Und dann gibt es Phasen,
+in denen gar nichts geht.</a:t>
             </a:r>
           </a:p>
         </p:txBody>
@@ -5498,7 +5640,7 @@
                 </a:solidFill>
                 <a:latin typeface="Calibri"/>
               </a:rPr>
-              <a:t>Vier Wochen sind die Mindestdosis, bevor überhaupt etwas messbar wird.</a:t>
+              <a:t>Auch die gehören dazu. Auch die sind Teil vom Aufbau.</a:t>
             </a:r>
           </a:p>
         </p:txBody>
@@ -5627,7 +5769,7 @@
                 </a:solidFill>
                 <a:latin typeface="Georgia"/>
               </a:rPr>
-              <a:t>Was ich am häufigsten sehe</a:t>
+              <a:t>Was in so einer Phase gilt</a:t>
             </a:r>
           </a:p>
         </p:txBody>
@@ -5666,7 +5808,7 @@
                 </a:solidFill>
                 <a:latin typeface="Calibri"/>
               </a:rPr>
-              <a:t>–  </a:t>
+              <a:t>✓  </a:t>
             </a:r>
             <a:r>
               <a:rPr sz="1600" b="0">
@@ -5675,7 +5817,7 @@
                 </a:solidFill>
                 <a:latin typeface="Calibri"/>
               </a:rPr>
-              <a:t>Jemand zieht etwas richtig durch — und es funktioniert sofort</a:t>
+              <a:t>Eine Pause ist keine verlorene Zeit — dein Aufgebautes bleibt</a:t>
             </a:r>
           </a:p>
           <a:p>
@@ -5691,7 +5833,7 @@
                 </a:solidFill>
                 <a:latin typeface="Calibri"/>
               </a:rPr>
-              <a:t>–  </a:t>
+              <a:t>✓  </a:t>
             </a:r>
             <a:r>
               <a:rPr sz="1600" b="0">
@@ -5700,7 +5842,7 @@
                 </a:solidFill>
                 <a:latin typeface="Calibri"/>
               </a:rPr>
-              <a:t>Die Reichweite geht rauf, es kommt Bewegung rein</a:t>
+              <a:t>Pause ist nicht aufhören — aufhören heisst stilles Wegbleiben</a:t>
             </a:r>
           </a:p>
           <a:p>
@@ -5716,7 +5858,7 @@
                 </a:solidFill>
                 <a:latin typeface="Calibri"/>
               </a:rPr>
-              <a:t>–  </a:t>
+              <a:t>✓  </a:t>
             </a:r>
             <a:r>
               <a:rPr sz="1600" b="0">
@@ -5725,7 +5867,7 @@
                 </a:solidFill>
                 <a:latin typeface="Calibri"/>
               </a:rPr>
-              <a:t>Dann kommt eine Woche mit krankem Kind</a:t>
+              <a:t>Sag es laut, dann muss niemand raten — ein Satz bei uns reicht</a:t>
             </a:r>
           </a:p>
           <a:p>
@@ -5741,7 +5883,7 @@
                 </a:solidFill>
                 <a:latin typeface="Calibri"/>
               </a:rPr>
-              <a:t>–  </a:t>
+              <a:t>✓  </a:t>
             </a:r>
             <a:r>
               <a:rPr sz="1600" b="0">
@@ -5750,7 +5892,7 @@
                 </a:solidFill>
                 <a:latin typeface="Calibri"/>
               </a:rPr>
-              <a:t>Und danach kommt es nie wieder zurück — alles fällt zusammen</a:t>
+              <a:t>Und wenn du wieder kannst, fängst du nicht bei null an</a:t>
             </a:r>
           </a:p>
         </p:txBody>
@@ -5922,9 +6064,8 @@
                 </a:solidFill>
                 <a:latin typeface="Georgia"/>
               </a:rPr>
-              <a:t>Es liegt nie an dir als Person.
-Meistens ist einfach
-das System zu gross gebaut.</a:t>
+              <a:t>Vier Wochen sind
+keine Challenge.</a:t>
             </a:r>
           </a:p>
         </p:txBody>
@@ -5958,7 +6099,7 @@
                 </a:solidFill>
                 <a:latin typeface="Calibri"/>
               </a:rPr>
-              <a:t>Jeden Tag ein Beitrag neben Kindern ist kein Rhythmus. Das ist ein Sprint.</a:t>
+              <a:t>Vier Wochen sind die Mindestdosis, bevor überhaupt etwas messbar wird.</a:t>
             </a:r>
           </a:p>
         </p:txBody>
@@ -6087,7 +6228,7 @@
                 </a:solidFill>
                 <a:latin typeface="Georgia"/>
               </a:rPr>
-              <a:t>Die Regel, die alles ändert</a:t>
+              <a:t>Was ich am häufigsten sehe</a:t>
             </a:r>
           </a:p>
         </p:txBody>
@@ -6126,7 +6267,7 @@
                 </a:solidFill>
                 <a:latin typeface="Calibri"/>
               </a:rPr>
-              <a:t>✓  </a:t>
+              <a:t>–  </a:t>
             </a:r>
             <a:r>
               <a:rPr sz="1600" b="0">
@@ -6135,7 +6276,7 @@
                 </a:solidFill>
                 <a:latin typeface="Calibri"/>
               </a:rPr>
-              <a:t>Wähl EINE Sache. Nicht drei.</a:t>
+              <a:t>Jemand zieht etwas richtig durch — und es funktioniert sofort</a:t>
             </a:r>
           </a:p>
           <a:p>
@@ -6151,7 +6292,7 @@
                 </a:solidFill>
                 <a:latin typeface="Calibri"/>
               </a:rPr>
-              <a:t>✓  </a:t>
+              <a:t>–  </a:t>
             </a:r>
             <a:r>
               <a:rPr sz="1600" b="0">
@@ -6160,7 +6301,7 @@
                 </a:solidFill>
                 <a:latin typeface="Calibri"/>
               </a:rPr>
-              <a:t>Sie muss so klein sein, dass du sie auch an einem</a:t>
+              <a:t>Die Reichweite geht rauf, es kommt Bewegung rein</a:t>
             </a:r>
           </a:p>
           <a:p>
@@ -6176,7 +6317,7 @@
                 </a:solidFill>
                 <a:latin typeface="Calibri"/>
               </a:rPr>
-              <a:t>✓  </a:t>
+              <a:t>–  </a:t>
             </a:r>
             <a:r>
               <a:rPr sz="1600" b="0">
@@ -6185,7 +6326,7 @@
                 </a:solidFill>
                 <a:latin typeface="Calibri"/>
               </a:rPr>
-              <a:t>beschissenen Tag noch schaffst</a:t>
+              <a:t>Dann kommt eine Woche mit krankem Kind</a:t>
             </a:r>
           </a:p>
           <a:p>
@@ -6201,7 +6342,7 @@
                 </a:solidFill>
                 <a:latin typeface="Calibri"/>
               </a:rPr>
-              <a:t>✓  </a:t>
+              <a:t>–  </a:t>
             </a:r>
             <a:r>
               <a:rPr sz="1600" b="0">
@@ -6210,7 +6351,7 @@
                 </a:solidFill>
                 <a:latin typeface="Calibri"/>
               </a:rPr>
-              <a:t>Und sie kriegt eine Notfall-Version für genau diese Tage</a:t>
+              <a:t>Und danach kommt es nie wieder zurück — alles fällt zusammen</a:t>
             </a:r>
           </a:p>
         </p:txBody>
@@ -6312,14 +6453,57 @@
       <p:grpSpPr/>
       <p:sp>
         <p:nvSpPr>
-          <p:cNvPr id="2" name="TextBox 1"/>
+          <p:cNvPr id="2" name="Rectangle 1"/>
+          <p:cNvSpPr/>
+          <p:nvPr/>
+        </p:nvSpPr>
+        <p:spPr>
+          <a:xfrm>
+            <a:off x="548640" y="1371600"/>
+            <a:ext cx="82296" cy="2377440"/>
+          </a:xfrm>
+          <a:prstGeom prst="rect">
+            <a:avLst/>
+          </a:prstGeom>
+          <a:solidFill>
+            <a:srgbClr val="DC822E"/>
+          </a:solidFill>
+          <a:ln>
+            <a:noFill/>
+          </a:ln>
+        </p:spPr>
+        <p:style>
+          <a:lnRef idx="1">
+            <a:schemeClr val="accent1"/>
+          </a:lnRef>
+          <a:fillRef idx="3">
+            <a:schemeClr val="accent1"/>
+          </a:fillRef>
+          <a:effectRef idx="2">
+            <a:schemeClr val="accent1"/>
+          </a:effectRef>
+          <a:fontRef idx="minor">
+            <a:schemeClr val="lt1"/>
+          </a:fontRef>
+        </p:style>
+        <p:txBody>
+          <a:bodyPr rtlCol="0" anchor="ctr"/>
+          <a:lstStyle/>
+          <a:p>
+            <a:pPr algn="ctr"/>
+          </a:p>
+        </p:txBody>
+      </p:sp>
+      <p:sp>
+        <p:nvSpPr>
+          <p:cNvPr id="3" name="TextBox 2"/>
           <p:cNvSpPr txBox="1"/>
           <p:nvPr/>
         </p:nvSpPr>
         <p:spPr>
           <a:xfrm>
-            <a:off x="548640" y="457200"/>
-            <a:ext cx="8046720" cy="914400"/>
+            <a:off x="1005840" y="1371600"/>
+            <a:ext cx="7315200" cy="2377440"/>
           </a:xfrm>
           <a:prstGeom prst="rect">
             <a:avLst/>
@@ -6339,21 +6523,23 @@
                 </a:solidFill>
                 <a:latin typeface="Georgia"/>
               </a:rPr>
-              <a:t>So sieht das aus</a:t>
-            </a:r>
-          </a:p>
-        </p:txBody>
-      </p:sp>
-      <p:sp>
-        <p:nvSpPr>
-          <p:cNvPr id="3" name="TextBox 2"/>
+              <a:t>Es liegt nie an dir als Person.
+Meistens ist einfach
+das System zu gross gebaut.</a:t>
+            </a:r>
+          </a:p>
+        </p:txBody>
+      </p:sp>
+      <p:sp>
+        <p:nvSpPr>
+          <p:cNvPr id="4" name="TextBox 3"/>
           <p:cNvSpPr txBox="1"/>
           <p:nvPr/>
         </p:nvSpPr>
         <p:spPr>
           <a:xfrm>
-            <a:off x="548640" y="1417320"/>
-            <a:ext cx="8046720" cy="3154680"/>
+            <a:off x="1005840" y="3931920"/>
+            <a:ext cx="7315200" cy="457200"/>
           </a:xfrm>
           <a:prstGeom prst="rect">
             <a:avLst/>
@@ -6366,110 +6552,21 @@
           </a:bodyPr>
           <a:lstStyle/>
           <a:p>
-            <a:pPr>
-              <a:spcAft>
-                <a:spcPts val="1000"/>
-              </a:spcAft>
-            </a:pPr>
-            <a:r>
-              <a:rPr sz="1600" b="1">
+            <a:r>
+              <a:rPr sz="1400" b="0">
                 <a:solidFill>
                   <a:srgbClr val="12828C"/>
                 </a:solidFill>
                 <a:latin typeface="Calibri"/>
               </a:rPr>
-              <a:t>✓  </a:t>
-            </a:r>
-            <a:r>
-              <a:rPr sz="1600" b="0">
-                <a:solidFill>
-                  <a:srgbClr val="2C3E50"/>
-                </a:solidFill>
-                <a:latin typeface="Calibri"/>
-              </a:rPr>
-              <a:t>Jeden Tag eine Story  →  eine einzige Story mit dem Handy im Auto</a:t>
-            </a:r>
-          </a:p>
-          <a:p>
-            <a:pPr>
-              <a:spcAft>
-                <a:spcPts val="1000"/>
-              </a:spcAft>
-            </a:pPr>
-            <a:r>
-              <a:rPr sz="1600" b="1">
-                <a:solidFill>
-                  <a:srgbClr val="12828C"/>
-                </a:solidFill>
-                <a:latin typeface="Calibri"/>
-              </a:rPr>
-              <a:t>✓  </a:t>
-            </a:r>
-            <a:r>
-              <a:rPr sz="1600" b="0">
-                <a:solidFill>
-                  <a:srgbClr val="2C3E50"/>
-                </a:solidFill>
-                <a:latin typeface="Calibri"/>
-              </a:rPr>
-              <a:t>Drei Beiträge pro Woche  →  einer, dafür fix am selben Tag</a:t>
-            </a:r>
-          </a:p>
-          <a:p>
-            <a:pPr>
-              <a:spcAft>
-                <a:spcPts val="1000"/>
-              </a:spcAft>
-            </a:pPr>
-            <a:r>
-              <a:rPr sz="1600" b="1">
-                <a:solidFill>
-                  <a:srgbClr val="12828C"/>
-                </a:solidFill>
-                <a:latin typeface="Calibri"/>
-              </a:rPr>
-              <a:t>✓  </a:t>
-            </a:r>
-            <a:r>
-              <a:rPr sz="1600" b="0">
-                <a:solidFill>
-                  <a:srgbClr val="2C3E50"/>
-                </a:solidFill>
-                <a:latin typeface="Calibri"/>
-              </a:rPr>
-              <a:t>Jeden Tag zwei echte DMs  →  eine Sprachnachricht an eine Person</a:t>
-            </a:r>
-          </a:p>
-          <a:p>
-            <a:pPr>
-              <a:spcAft>
-                <a:spcPts val="1000"/>
-              </a:spcAft>
-            </a:pPr>
-            <a:r>
-              <a:rPr sz="1600" b="1">
-                <a:solidFill>
-                  <a:srgbClr val="12828C"/>
-                </a:solidFill>
-                <a:latin typeface="Calibri"/>
-              </a:rPr>
-              <a:t>✓  </a:t>
-            </a:r>
-            <a:r>
-              <a:rPr sz="1600" b="0">
-                <a:solidFill>
-                  <a:srgbClr val="2C3E50"/>
-                </a:solidFill>
-                <a:latin typeface="Calibri"/>
-              </a:rPr>
-              <a:t>Sonntags die Woche planen  →  zehn Minuten, drei Zeilen, fertig</a:t>
-            </a:r>
-          </a:p>
-        </p:txBody>
-      </p:sp>
-      <p:sp>
-        <p:nvSpPr>
-          <p:cNvPr id="4" name="TextBox 3"/>
+              <a:t>Jeden Tag ein Beitrag neben Kindern ist kein Rhythmus. Das ist ein Sprint.</a:t>
+            </a:r>
+          </a:p>
+        </p:txBody>
+      </p:sp>
+      <p:sp>
+        <p:nvSpPr>
+          <p:cNvPr id="5" name="TextBox 4"/>
           <p:cNvSpPr txBox="1"/>
           <p:nvPr/>
         </p:nvSpPr>
@@ -6503,7 +6600,7 @@
       </p:sp>
       <p:sp>
         <p:nvSpPr>
-          <p:cNvPr id="5" name="TextBox 4"/>
+          <p:cNvPr id="6" name="TextBox 5"/>
           <p:cNvSpPr txBox="1"/>
           <p:nvPr/>
         </p:nvSpPr>
@@ -6564,66 +6661,14 @@
       <p:grpSpPr/>
       <p:sp>
         <p:nvSpPr>
-          <p:cNvPr id="2" name="Rounded Rectangle 1"/>
-          <p:cNvSpPr/>
-          <p:nvPr/>
-        </p:nvSpPr>
-        <p:spPr>
-          <a:xfrm>
-            <a:off x="548640" y="457200"/>
-            <a:ext cx="1600200" cy="384048"/>
-          </a:xfrm>
-          <a:prstGeom prst="roundRect">
-            <a:avLst/>
-          </a:prstGeom>
-          <a:solidFill>
-            <a:srgbClr val="DC822E"/>
-          </a:solidFill>
-          <a:ln>
-            <a:noFill/>
-          </a:ln>
-        </p:spPr>
-        <p:style>
-          <a:lnRef idx="1">
-            <a:schemeClr val="accent1"/>
-          </a:lnRef>
-          <a:fillRef idx="3">
-            <a:schemeClr val="accent1"/>
-          </a:fillRef>
-          <a:effectRef idx="2">
-            <a:schemeClr val="accent1"/>
-          </a:effectRef>
-          <a:fontRef idx="minor">
-            <a:schemeClr val="lt1"/>
-          </a:fontRef>
-        </p:style>
-        <p:txBody>
-          <a:bodyPr rtlCol="0" anchor="ctr" wrap="none"/>
-          <a:lstStyle/>
-          <a:p>
-            <a:pPr algn="ctr"/>
-            <a:r>
-              <a:rPr sz="1200" b="1">
-                <a:solidFill>
-                  <a:srgbClr val="FFFFFF"/>
-                </a:solidFill>
-                <a:latin typeface="Calibri"/>
-              </a:rPr>
-              <a:t>JETZT DU</a:t>
-            </a:r>
-          </a:p>
-        </p:txBody>
-      </p:sp>
-      <p:sp>
-        <p:nvSpPr>
-          <p:cNvPr id="3" name="TextBox 2"/>
+          <p:cNvPr id="2" name="TextBox 1"/>
           <p:cNvSpPr txBox="1"/>
           <p:nvPr/>
         </p:nvSpPr>
         <p:spPr>
           <a:xfrm>
-            <a:off x="548640" y="1005840"/>
-            <a:ext cx="8046720" cy="822960"/>
+            <a:off x="548640" y="457200"/>
+            <a:ext cx="8046720" cy="914400"/>
           </a:xfrm>
           <a:prstGeom prst="rect">
             <a:avLst/>
@@ -6643,21 +6688,21 @@
                 </a:solidFill>
                 <a:latin typeface="Georgia"/>
               </a:rPr>
-              <a:t>Deine eine Sache</a:t>
-            </a:r>
-          </a:p>
-        </p:txBody>
-      </p:sp>
-      <p:sp>
-        <p:nvSpPr>
-          <p:cNvPr id="4" name="TextBox 3"/>
+              <a:t>Die Regel, die alles ändert</a:t>
+            </a:r>
+          </a:p>
+        </p:txBody>
+      </p:sp>
+      <p:sp>
+        <p:nvSpPr>
+          <p:cNvPr id="3" name="TextBox 2"/>
           <p:cNvSpPr txBox="1"/>
           <p:nvPr/>
         </p:nvSpPr>
         <p:spPr>
           <a:xfrm>
-            <a:off x="548640" y="1965960"/>
-            <a:ext cx="8046720" cy="2377440"/>
+            <a:off x="548640" y="1417320"/>
+            <a:ext cx="8046720" cy="3154680"/>
           </a:xfrm>
           <a:prstGeom prst="rect">
             <a:avLst/>
@@ -6672,65 +6717,115 @@
           <a:p>
             <a:pPr>
               <a:spcAft>
-                <a:spcPts val="1200"/>
+                <a:spcPts val="1000"/>
               </a:spcAft>
             </a:pPr>
             <a:r>
-              <a:rPr sz="1700" b="1">
-                <a:solidFill>
-                  <a:srgbClr val="DC822E"/>
-                </a:solidFill>
-                <a:latin typeface="Georgia"/>
-              </a:rPr>
-              <a:t>1.  </a:t>
-            </a:r>
-            <a:r>
-              <a:rPr sz="1700" b="0">
+              <a:rPr sz="1600" b="1">
+                <a:solidFill>
+                  <a:srgbClr val="12828C"/>
+                </a:solidFill>
+                <a:latin typeface="Calibri"/>
+              </a:rPr>
+              <a:t>✓  </a:t>
+            </a:r>
+            <a:r>
+              <a:rPr sz="1600" b="0">
                 <a:solidFill>
                   <a:srgbClr val="2C3E50"/>
                 </a:solidFill>
                 <a:latin typeface="Calibri"/>
               </a:rPr>
-              <a:t>Meine eine Sache für die nächsten vier Wochen: …</a:t>
+              <a:t>Wähl EINE Sache. Nicht drei.</a:t>
             </a:r>
           </a:p>
           <a:p>
             <a:pPr>
               <a:spcAft>
-                <a:spcPts val="1200"/>
+                <a:spcPts val="100"/>
               </a:spcAft>
             </a:pPr>
             <a:r>
-              <a:rPr sz="1700" b="1">
-                <a:solidFill>
-                  <a:srgbClr val="DC822E"/>
-                </a:solidFill>
-                <a:latin typeface="Georgia"/>
-              </a:rPr>
-              <a:t>2.  </a:t>
-            </a:r>
-            <a:r>
-              <a:rPr sz="1700" b="0">
+              <a:rPr sz="1600" b="1">
+                <a:solidFill>
+                  <a:srgbClr val="12828C"/>
+                </a:solidFill>
+                <a:latin typeface="Calibri"/>
+              </a:rPr>
+              <a:t>✓  </a:t>
+            </a:r>
+            <a:r>
+              <a:rPr sz="1600" b="0">
                 <a:solidFill>
                   <a:srgbClr val="2C3E50"/>
                 </a:solidFill>
                 <a:latin typeface="Calibri"/>
               </a:rPr>
-              <a:t>Meine Notfall-Version für schlechte Tage: …</a:t>
-            </a:r>
-          </a:p>
-        </p:txBody>
-      </p:sp>
-      <p:sp>
-        <p:nvSpPr>
-          <p:cNvPr id="5" name="TextBox 4"/>
+              <a:t>Sie muss so klein sein, dass du sie auch an einem</a:t>
+            </a:r>
+          </a:p>
+          <a:p>
+            <a:pPr>
+              <a:spcAft>
+                <a:spcPts val="1000"/>
+              </a:spcAft>
+            </a:pPr>
+            <a:r>
+              <a:rPr sz="1600" b="0">
+                <a:solidFill>
+                  <a:srgbClr val="2C3E50"/>
+                </a:solidFill>
+                <a:latin typeface="Calibri"/>
+              </a:rPr>
+              <a:t>      </a:t>
+            </a:r>
+            <a:r>
+              <a:rPr sz="1600" b="0">
+                <a:solidFill>
+                  <a:srgbClr val="2C3E50"/>
+                </a:solidFill>
+                <a:latin typeface="Calibri"/>
+              </a:rPr>
+              <a:t>beschissenen Tag noch schaffst</a:t>
+            </a:r>
+          </a:p>
+          <a:p>
+            <a:pPr>
+              <a:spcAft>
+                <a:spcPts val="1000"/>
+              </a:spcAft>
+            </a:pPr>
+            <a:r>
+              <a:rPr sz="1600" b="1">
+                <a:solidFill>
+                  <a:srgbClr val="12828C"/>
+                </a:solidFill>
+                <a:latin typeface="Calibri"/>
+              </a:rPr>
+              <a:t>✓  </a:t>
+            </a:r>
+            <a:r>
+              <a:rPr sz="1600" b="0">
+                <a:solidFill>
+                  <a:srgbClr val="2C3E50"/>
+                </a:solidFill>
+                <a:latin typeface="Calibri"/>
+              </a:rPr>
+              <a:t>Und sie kriegt eine Notfall-Version — gleichwertig, kein Rückfall</a:t>
+            </a:r>
+          </a:p>
+        </p:txBody>
+      </p:sp>
+      <p:sp>
+        <p:nvSpPr>
+          <p:cNvPr id="4" name="TextBox 3"/>
           <p:cNvSpPr txBox="1"/>
           <p:nvPr/>
         </p:nvSpPr>
         <p:spPr>
           <a:xfrm>
-            <a:off x="548640" y="4343400"/>
-            <a:ext cx="8046720" cy="365760"/>
+            <a:off x="457200" y="4754880"/>
+            <a:ext cx="5486400" cy="274320"/>
           </a:xfrm>
           <a:prstGeom prst="rect">
             <a:avLst/>
@@ -6744,40 +6839,6 @@
           <a:lstStyle/>
           <a:p>
             <a:r>
-              <a:rPr sz="1300" b="0">
-                <a:solidFill>
-                  <a:srgbClr val="12828C"/>
-                </a:solidFill>
-                <a:latin typeface="Calibri"/>
-              </a:rPr>
-              <a:t>Zwei Zeilen — danach sagst du sie laut in die Runde.</a:t>
-            </a:r>
-          </a:p>
-        </p:txBody>
-      </p:sp>
-      <p:sp>
-        <p:nvSpPr>
-          <p:cNvPr id="6" name="TextBox 5"/>
-          <p:cNvSpPr txBox="1"/>
-          <p:nvPr/>
-        </p:nvSpPr>
-        <p:spPr>
-          <a:xfrm>
-            <a:off x="457200" y="4754880"/>
-            <a:ext cx="5486400" cy="274320"/>
-          </a:xfrm>
-          <a:prstGeom prst="rect">
-            <a:avLst/>
-          </a:prstGeom>
-          <a:noFill/>
-        </p:spPr>
-        <p:txBody>
-          <a:bodyPr wrap="square">
-            <a:spAutoFit/>
-          </a:bodyPr>
-          <a:lstStyle/>
-          <a:p>
-            <a:r>
               <a:rPr sz="900" b="0">
                 <a:solidFill>
                   <a:srgbClr val="7A8A95"/>
@@ -6791,7 +6852,7 @@
       </p:sp>
       <p:sp>
         <p:nvSpPr>
-          <p:cNvPr id="7" name="TextBox 6"/>
+          <p:cNvPr id="5" name="TextBox 4"/>
           <p:cNvSpPr txBox="1"/>
           <p:nvPr/>
         </p:nvSpPr>
@@ -6879,7 +6940,7 @@
                 </a:solidFill>
                 <a:latin typeface="Georgia"/>
               </a:rPr>
-              <a:t>Deine Aufgabe für vier Wochen</a:t>
+              <a:t>So sieht das aus</a:t>
             </a:r>
           </a:p>
         </p:txBody>
@@ -6927,7 +6988,7 @@
                 </a:solidFill>
                 <a:latin typeface="Calibri"/>
               </a:rPr>
-              <a:t>Vier Wochen deine eine Sache durchziehen</a:t>
+              <a:t>Jeden Tag eine Story  →  eine einzige Story mit dem Handy im Auto</a:t>
             </a:r>
           </a:p>
           <a:p>
@@ -6952,7 +7013,7 @@
                 </a:solidFill>
                 <a:latin typeface="Calibri"/>
               </a:rPr>
-              <a:t>Jede Woche drei Zeilen bei uns im Fragen-Bereich</a:t>
+              <a:t>Drei Beiträge pro Woche  →  einer, dafür fix am selben Tag</a:t>
             </a:r>
           </a:p>
           <a:p>
@@ -6977,7 +7038,7 @@
                 </a:solidFill>
                 <a:latin typeface="Calibri"/>
               </a:rPr>
-              <a:t>Meine Sache · Durchgezogen: ja / mit Notfall-Version / nein</a:t>
+              <a:t>Jeden Tag zwei echte DMs  →  eine Sprachnachricht an eine Person</a:t>
             </a:r>
           </a:p>
           <a:p>
@@ -7002,7 +7063,7 @@
                 </a:solidFill>
                 <a:latin typeface="Calibri"/>
               </a:rPr>
-              <a:t>Was passiert ist — und da geht es NICHT ums Geld</a:t>
+              <a:t>Sonntags die Woche planen  →  zehn Minuten, drei Zeilen, fertig</a:t>
             </a:r>
           </a:p>
         </p:txBody>
@@ -7104,14 +7165,66 @@
       <p:grpSpPr/>
       <p:sp>
         <p:nvSpPr>
-          <p:cNvPr id="2" name="TextBox 1"/>
+          <p:cNvPr id="2" name="Rounded Rectangle 1"/>
+          <p:cNvSpPr/>
+          <p:nvPr/>
+        </p:nvSpPr>
+        <p:spPr>
+          <a:xfrm>
+            <a:off x="548640" y="457200"/>
+            <a:ext cx="1600200" cy="384048"/>
+          </a:xfrm>
+          <a:prstGeom prst="roundRect">
+            <a:avLst/>
+          </a:prstGeom>
+          <a:solidFill>
+            <a:srgbClr val="DC822E"/>
+          </a:solidFill>
+          <a:ln>
+            <a:noFill/>
+          </a:ln>
+        </p:spPr>
+        <p:style>
+          <a:lnRef idx="1">
+            <a:schemeClr val="accent1"/>
+          </a:lnRef>
+          <a:fillRef idx="3">
+            <a:schemeClr val="accent1"/>
+          </a:fillRef>
+          <a:effectRef idx="2">
+            <a:schemeClr val="accent1"/>
+          </a:effectRef>
+          <a:fontRef idx="minor">
+            <a:schemeClr val="lt1"/>
+          </a:fontRef>
+        </p:style>
+        <p:txBody>
+          <a:bodyPr rtlCol="0" anchor="ctr" wrap="none"/>
+          <a:lstStyle/>
+          <a:p>
+            <a:pPr algn="ctr"/>
+            <a:r>
+              <a:rPr sz="1200" b="1">
+                <a:solidFill>
+                  <a:srgbClr val="FFFFFF"/>
+                </a:solidFill>
+                <a:latin typeface="Calibri"/>
+              </a:rPr>
+              <a:t>JETZT DU</a:t>
+            </a:r>
+          </a:p>
+        </p:txBody>
+      </p:sp>
+      <p:sp>
+        <p:nvSpPr>
+          <p:cNvPr id="3" name="TextBox 2"/>
           <p:cNvSpPr txBox="1"/>
           <p:nvPr/>
         </p:nvSpPr>
         <p:spPr>
           <a:xfrm>
-            <a:off x="548640" y="457200"/>
-            <a:ext cx="8046720" cy="914400"/>
+            <a:off x="548640" y="1005840"/>
+            <a:ext cx="8046720" cy="822960"/>
           </a:xfrm>
           <a:prstGeom prst="rect">
             <a:avLst/>
@@ -7131,21 +7244,21 @@
                 </a:solidFill>
                 <a:latin typeface="Georgia"/>
               </a:rPr>
-              <a:t>Und wenn eine Woche nicht klappt?</a:t>
-            </a:r>
-          </a:p>
-        </p:txBody>
-      </p:sp>
-      <p:sp>
-        <p:nvSpPr>
-          <p:cNvPr id="3" name="TextBox 2"/>
+              <a:t>Deine eine Sache</a:t>
+            </a:r>
+          </a:p>
+        </p:txBody>
+      </p:sp>
+      <p:sp>
+        <p:nvSpPr>
+          <p:cNvPr id="4" name="TextBox 3"/>
           <p:cNvSpPr txBox="1"/>
           <p:nvPr/>
         </p:nvSpPr>
         <p:spPr>
           <a:xfrm>
-            <a:off x="548640" y="1417320"/>
-            <a:ext cx="8046720" cy="3154680"/>
+            <a:off x="548640" y="1965960"/>
+            <a:ext cx="8046720" cy="2377440"/>
           </a:xfrm>
           <a:prstGeom prst="rect">
             <a:avLst/>
@@ -7160,115 +7273,65 @@
           <a:p>
             <a:pPr>
               <a:spcAft>
-                <a:spcPts val="1000"/>
+                <a:spcPts val="1200"/>
               </a:spcAft>
             </a:pPr>
             <a:r>
-              <a:rPr sz="1600" b="1">
-                <a:solidFill>
-                  <a:srgbClr val="12828C"/>
-                </a:solidFill>
-                <a:latin typeface="Calibri"/>
-              </a:rPr>
-              <a:t>✓  </a:t>
-            </a:r>
-            <a:r>
-              <a:rPr sz="1600" b="0">
+              <a:rPr sz="1700" b="1">
+                <a:solidFill>
+                  <a:srgbClr val="DC822E"/>
+                </a:solidFill>
+                <a:latin typeface="Georgia"/>
+              </a:rPr>
+              <a:t>1.  </a:t>
+            </a:r>
+            <a:r>
+              <a:rPr sz="1700" b="0">
                 <a:solidFill>
                   <a:srgbClr val="2C3E50"/>
                 </a:solidFill>
                 <a:latin typeface="Calibri"/>
               </a:rPr>
-              <a:t>Dann schreibst du genau das rein</a:t>
+              <a:t>Meine eine Sache für die nächsten vier Wochen: …</a:t>
             </a:r>
           </a:p>
           <a:p>
             <a:pPr>
               <a:spcAft>
-                <a:spcPts val="1000"/>
+                <a:spcPts val="1200"/>
               </a:spcAft>
             </a:pPr>
             <a:r>
-              <a:rPr sz="1600" b="1">
-                <a:solidFill>
-                  <a:srgbClr val="12828C"/>
-                </a:solidFill>
-                <a:latin typeface="Calibri"/>
-              </a:rPr>
-              <a:t>✓  </a:t>
-            </a:r>
-            <a:r>
-              <a:rPr sz="1600" b="0">
+              <a:rPr sz="1700" b="1">
+                <a:solidFill>
+                  <a:srgbClr val="DC822E"/>
+                </a:solidFill>
+                <a:latin typeface="Georgia"/>
+              </a:rPr>
+              <a:t>2.  </a:t>
+            </a:r>
+            <a:r>
+              <a:rPr sz="1700" b="0">
                 <a:solidFill>
                   <a:srgbClr val="2C3E50"/>
                 </a:solidFill>
                 <a:latin typeface="Calibri"/>
               </a:rPr>
-              <a:t>Wir schauen gemeinsam, ob deine Sache zu gross gebaut war</a:t>
-            </a:r>
-          </a:p>
-          <a:p>
-            <a:pPr>
-              <a:spcAft>
-                <a:spcPts val="1000"/>
-              </a:spcAft>
-            </a:pPr>
-            <a:r>
-              <a:rPr sz="1600" b="1">
-                <a:solidFill>
-                  <a:srgbClr val="12828C"/>
-                </a:solidFill>
-                <a:latin typeface="Calibri"/>
-              </a:rPr>
-              <a:t>✓  </a:t>
-            </a:r>
-            <a:r>
-              <a:rPr sz="1600" b="0">
-                <a:solidFill>
-                  <a:srgbClr val="2C3E50"/>
-                </a:solidFill>
-                <a:latin typeface="Calibri"/>
-              </a:rPr>
-              <a:t>Dranbleiben heisst nicht lückenlos — es heisst zurückkommen</a:t>
-            </a:r>
-          </a:p>
-          <a:p>
-            <a:pPr>
-              <a:spcAft>
-                <a:spcPts val="1000"/>
-              </a:spcAft>
-            </a:pPr>
-            <a:r>
-              <a:rPr sz="1600" b="1">
-                <a:solidFill>
-                  <a:srgbClr val="12828C"/>
-                </a:solidFill>
-                <a:latin typeface="Calibri"/>
-              </a:rPr>
-              <a:t>✓  </a:t>
-            </a:r>
-            <a:r>
-              <a:rPr sz="1600" b="0">
-                <a:solidFill>
-                  <a:srgbClr val="2C3E50"/>
-                </a:solidFill>
-                <a:latin typeface="Calibri"/>
-              </a:rPr>
-              <a:t>Aufhören ist das Einzige, was hier wirklich nicht funktioniert</a:t>
-            </a:r>
-          </a:p>
-        </p:txBody>
-      </p:sp>
-      <p:sp>
-        <p:nvSpPr>
-          <p:cNvPr id="4" name="TextBox 3"/>
+              <a:t>Meine Notfall-Version für schlechte Tage: …</a:t>
+            </a:r>
+          </a:p>
+        </p:txBody>
+      </p:sp>
+      <p:sp>
+        <p:nvSpPr>
+          <p:cNvPr id="5" name="TextBox 4"/>
           <p:cNvSpPr txBox="1"/>
           <p:nvPr/>
         </p:nvSpPr>
         <p:spPr>
           <a:xfrm>
-            <a:off x="457200" y="4754880"/>
-            <a:ext cx="5486400" cy="274320"/>
+            <a:off x="548640" y="4343400"/>
+            <a:ext cx="8046720" cy="365760"/>
           </a:xfrm>
           <a:prstGeom prst="rect">
             <a:avLst/>
@@ -7282,6 +7345,40 @@
           <a:lstStyle/>
           <a:p>
             <a:r>
+              <a:rPr sz="1300" b="0">
+                <a:solidFill>
+                  <a:srgbClr val="12828C"/>
+                </a:solidFill>
+                <a:latin typeface="Calibri"/>
+              </a:rPr>
+              <a:t>Zwei Zeilen — danach sagst du sie laut in die Runde.</a:t>
+            </a:r>
+          </a:p>
+        </p:txBody>
+      </p:sp>
+      <p:sp>
+        <p:nvSpPr>
+          <p:cNvPr id="6" name="TextBox 5"/>
+          <p:cNvSpPr txBox="1"/>
+          <p:nvPr/>
+        </p:nvSpPr>
+        <p:spPr>
+          <a:xfrm>
+            <a:off x="457200" y="4754880"/>
+            <a:ext cx="5486400" cy="274320"/>
+          </a:xfrm>
+          <a:prstGeom prst="rect">
+            <a:avLst/>
+          </a:prstGeom>
+          <a:noFill/>
+        </p:spPr>
+        <p:txBody>
+          <a:bodyPr wrap="square">
+            <a:spAutoFit/>
+          </a:bodyPr>
+          <a:lstStyle/>
+          <a:p>
+            <a:r>
               <a:rPr sz="900" b="0">
                 <a:solidFill>
                   <a:srgbClr val="7A8A95"/>
@@ -7295,7 +7392,7 @@
       </p:sp>
       <p:sp>
         <p:nvSpPr>
-          <p:cNvPr id="5" name="TextBox 4"/>
+          <p:cNvPr id="7" name="TextBox 6"/>
           <p:cNvSpPr txBox="1"/>
           <p:nvPr/>
         </p:nvSpPr>
@@ -7383,7 +7480,7 @@
                 </a:solidFill>
                 <a:latin typeface="Georgia"/>
               </a:rPr>
-              <a:t>Wie es weitergeht</a:t>
+              <a:t>Deine Aufgabe für vier Wochen</a:t>
             </a:r>
           </a:p>
         </p:txBody>
@@ -7431,7 +7528,7 @@
                 </a:solidFill>
                 <a:latin typeface="Calibri"/>
               </a:rPr>
-              <a:t>Zwei Calls im Monat — ein Thema mit euren Fragen, einer nur für Fragen</a:t>
+              <a:t>Vier Wochen deine eine Sache durchziehen</a:t>
             </a:r>
           </a:p>
           <a:p>
@@ -7456,7 +7553,7 @@
                 </a:solidFill>
                 <a:latin typeface="Calibri"/>
               </a:rPr>
-              <a:t>Alles wird aufgezeichnet und liegt in der Academy</a:t>
+              <a:t>Jede Woche drei Zeilen bei uns im Fragen-Bereich</a:t>
             </a:r>
           </a:p>
           <a:p>
@@ -7481,7 +7578,7 @@
                 </a:solidFill>
                 <a:latin typeface="Calibri"/>
               </a:rPr>
-              <a:t>Zwischendurch: Fragen-Bereich, ich bin Di &amp; Do drin</a:t>
+              <a:t>Meine Sache · Durchgezogen: ja / mit Notfall-Version / nein</a:t>
             </a:r>
           </a:p>
           <a:p>
@@ -7506,7 +7603,32 @@
                 </a:solidFill>
                 <a:latin typeface="Calibri"/>
               </a:rPr>
-              <a:t>Nächster Themen-Call: deine vier Wochen — und dein Thema</a:t>
+              <a:t>Was passiert ist — und da geht es NICHT ums Geld</a:t>
+            </a:r>
+          </a:p>
+          <a:p>
+            <a:pPr>
+              <a:spcAft>
+                <a:spcPts val="1000"/>
+              </a:spcAft>
+            </a:pPr>
+            <a:r>
+              <a:rPr sz="1600" b="1">
+                <a:solidFill>
+                  <a:srgbClr val="12828C"/>
+                </a:solidFill>
+                <a:latin typeface="Calibri"/>
+              </a:rPr>
+              <a:t>✓  </a:t>
+            </a:r>
+            <a:r>
+              <a:rPr sz="1600" b="0">
+                <a:solidFill>
+                  <a:srgbClr val="2C3E50"/>
+                </a:solidFill>
+                <a:latin typeface="Calibri"/>
+              </a:rPr>
+              <a:t>Geht gerade gar nichts? Dann SIND die drei Zeilen deine eine Sache</a:t>
             </a:r>
           </a:p>
         </p:txBody>
@@ -7865,6 +7987,510 @@
 </p:sld>
 </file>
 
+<file path=ppt/slides/slide20.xml><?xml version="1.0" encoding="utf-8"?>
+<p:sld xmlns:a="http://schemas.openxmlformats.org/drawingml/2006/main" xmlns:p="http://schemas.openxmlformats.org/presentationml/2006/main" xmlns:r="http://schemas.openxmlformats.org/officeDocument/2006/relationships">
+  <p:cSld>
+    <p:bg>
+      <p:bgPr>
+        <a:solidFill>
+          <a:srgbClr val="F1ECDD"/>
+        </a:solidFill>
+        <a:effectLst/>
+      </p:bgPr>
+    </p:bg>
+    <p:spTree>
+      <p:nvGrpSpPr>
+        <p:cNvPr id="1" name=""/>
+        <p:cNvGrpSpPr/>
+        <p:nvPr/>
+      </p:nvGrpSpPr>
+      <p:grpSpPr/>
+      <p:sp>
+        <p:nvSpPr>
+          <p:cNvPr id="2" name="TextBox 1"/>
+          <p:cNvSpPr txBox="1"/>
+          <p:nvPr/>
+        </p:nvSpPr>
+        <p:spPr>
+          <a:xfrm>
+            <a:off x="548640" y="457200"/>
+            <a:ext cx="8046720" cy="914400"/>
+          </a:xfrm>
+          <a:prstGeom prst="rect">
+            <a:avLst/>
+          </a:prstGeom>
+          <a:noFill/>
+        </p:spPr>
+        <p:txBody>
+          <a:bodyPr wrap="square">
+            <a:spAutoFit/>
+          </a:bodyPr>
+          <a:lstStyle/>
+          <a:p>
+            <a:r>
+              <a:rPr sz="3000" b="1">
+                <a:solidFill>
+                  <a:srgbClr val="1A3A4A"/>
+                </a:solidFill>
+                <a:latin typeface="Georgia"/>
+              </a:rPr>
+              <a:t>Und wenn eine Woche nicht klappt?</a:t>
+            </a:r>
+          </a:p>
+        </p:txBody>
+      </p:sp>
+      <p:sp>
+        <p:nvSpPr>
+          <p:cNvPr id="3" name="TextBox 2"/>
+          <p:cNvSpPr txBox="1"/>
+          <p:nvPr/>
+        </p:nvSpPr>
+        <p:spPr>
+          <a:xfrm>
+            <a:off x="548640" y="1417320"/>
+            <a:ext cx="8046720" cy="3154680"/>
+          </a:xfrm>
+          <a:prstGeom prst="rect">
+            <a:avLst/>
+          </a:prstGeom>
+          <a:noFill/>
+        </p:spPr>
+        <p:txBody>
+          <a:bodyPr wrap="square">
+            <a:spAutoFit/>
+          </a:bodyPr>
+          <a:lstStyle/>
+          <a:p>
+            <a:pPr>
+              <a:spcAft>
+                <a:spcPts val="1000"/>
+              </a:spcAft>
+            </a:pPr>
+            <a:r>
+              <a:rPr sz="1600" b="1">
+                <a:solidFill>
+                  <a:srgbClr val="12828C"/>
+                </a:solidFill>
+                <a:latin typeface="Calibri"/>
+              </a:rPr>
+              <a:t>✓  </a:t>
+            </a:r>
+            <a:r>
+              <a:rPr sz="1600" b="0">
+                <a:solidFill>
+                  <a:srgbClr val="2C3E50"/>
+                </a:solidFill>
+                <a:latin typeface="Calibri"/>
+              </a:rPr>
+              <a:t>Dann schreibst du genau das rein</a:t>
+            </a:r>
+          </a:p>
+          <a:p>
+            <a:pPr>
+              <a:spcAft>
+                <a:spcPts val="1000"/>
+              </a:spcAft>
+            </a:pPr>
+            <a:r>
+              <a:rPr sz="1600" b="1">
+                <a:solidFill>
+                  <a:srgbClr val="12828C"/>
+                </a:solidFill>
+                <a:latin typeface="Calibri"/>
+              </a:rPr>
+              <a:t>✓  </a:t>
+            </a:r>
+            <a:r>
+              <a:rPr sz="1600" b="0">
+                <a:solidFill>
+                  <a:srgbClr val="2C3E50"/>
+                </a:solidFill>
+                <a:latin typeface="Calibri"/>
+              </a:rPr>
+              <a:t>Wir schauen gemeinsam, ob deine Sache zu gross gebaut war</a:t>
+            </a:r>
+          </a:p>
+          <a:p>
+            <a:pPr>
+              <a:spcAft>
+                <a:spcPts val="1000"/>
+              </a:spcAft>
+            </a:pPr>
+            <a:r>
+              <a:rPr sz="1600" b="1">
+                <a:solidFill>
+                  <a:srgbClr val="12828C"/>
+                </a:solidFill>
+                <a:latin typeface="Calibri"/>
+              </a:rPr>
+              <a:t>✓  </a:t>
+            </a:r>
+            <a:r>
+              <a:rPr sz="1600" b="0">
+                <a:solidFill>
+                  <a:srgbClr val="2C3E50"/>
+                </a:solidFill>
+                <a:latin typeface="Calibri"/>
+              </a:rPr>
+              <a:t>Dranbleiben heisst nicht lückenlos — es heisst zurückkommen</a:t>
+            </a:r>
+          </a:p>
+          <a:p>
+            <a:pPr>
+              <a:spcAft>
+                <a:spcPts val="1000"/>
+              </a:spcAft>
+            </a:pPr>
+            <a:r>
+              <a:rPr sz="1600" b="1">
+                <a:solidFill>
+                  <a:srgbClr val="12828C"/>
+                </a:solidFill>
+                <a:latin typeface="Calibri"/>
+              </a:rPr>
+              <a:t>✓  </a:t>
+            </a:r>
+            <a:r>
+              <a:rPr sz="1600" b="0">
+                <a:solidFill>
+                  <a:srgbClr val="2C3E50"/>
+                </a:solidFill>
+                <a:latin typeface="Calibri"/>
+              </a:rPr>
+              <a:t>Pause ist nicht aufhören — aufhören heisst stilles Wegbleiben</a:t>
+            </a:r>
+          </a:p>
+        </p:txBody>
+      </p:sp>
+      <p:sp>
+        <p:nvSpPr>
+          <p:cNvPr id="4" name="TextBox 3"/>
+          <p:cNvSpPr txBox="1"/>
+          <p:nvPr/>
+        </p:nvSpPr>
+        <p:spPr>
+          <a:xfrm>
+            <a:off x="457200" y="4754880"/>
+            <a:ext cx="5486400" cy="274320"/>
+          </a:xfrm>
+          <a:prstGeom prst="rect">
+            <a:avLst/>
+          </a:prstGeom>
+          <a:noFill/>
+        </p:spPr>
+        <p:txBody>
+          <a:bodyPr wrap="square">
+            <a:spAutoFit/>
+          </a:bodyPr>
+          <a:lstStyle/>
+          <a:p>
+            <a:r>
+              <a:rPr sz="900" b="0">
+                <a:solidFill>
+                  <a:srgbClr val="7A8A95"/>
+                </a:solidFill>
+                <a:latin typeface="Calibri"/>
+              </a:rPr>
+              <a:t>MBA · Umsetzerinnen-Call 1 · Dranbleiben &amp; Konsistenz</a:t>
+            </a:r>
+          </a:p>
+        </p:txBody>
+      </p:sp>
+      <p:sp>
+        <p:nvSpPr>
+          <p:cNvPr id="5" name="TextBox 4"/>
+          <p:cNvSpPr txBox="1"/>
+          <p:nvPr/>
+        </p:nvSpPr>
+        <p:spPr>
+          <a:xfrm>
+            <a:off x="6400800" y="4754880"/>
+            <a:ext cx="2286000" cy="274320"/>
+          </a:xfrm>
+          <a:prstGeom prst="rect">
+            <a:avLst/>
+          </a:prstGeom>
+          <a:noFill/>
+        </p:spPr>
+        <p:txBody>
+          <a:bodyPr wrap="square">
+            <a:spAutoFit/>
+          </a:bodyPr>
+          <a:lstStyle/>
+          <a:p>
+            <a:pPr algn="r"/>
+            <a:r>
+              <a:rPr sz="900" b="0">
+                <a:solidFill>
+                  <a:srgbClr val="7A8A95"/>
+                </a:solidFill>
+                <a:latin typeface="Calibri"/>
+              </a:rPr>
+              <a:t>Mum Life Balance</a:t>
+            </a:r>
+          </a:p>
+        </p:txBody>
+      </p:sp>
+    </p:spTree>
+  </p:cSld>
+  <p:clrMapOvr>
+    <a:masterClrMapping/>
+  </p:clrMapOvr>
+</p:sld>
+</file>
+
+<file path=ppt/slides/slide21.xml><?xml version="1.0" encoding="utf-8"?>
+<p:sld xmlns:a="http://schemas.openxmlformats.org/drawingml/2006/main" xmlns:p="http://schemas.openxmlformats.org/presentationml/2006/main" xmlns:r="http://schemas.openxmlformats.org/officeDocument/2006/relationships">
+  <p:cSld>
+    <p:bg>
+      <p:bgPr>
+        <a:solidFill>
+          <a:srgbClr val="F1ECDD"/>
+        </a:solidFill>
+        <a:effectLst/>
+      </p:bgPr>
+    </p:bg>
+    <p:spTree>
+      <p:nvGrpSpPr>
+        <p:cNvPr id="1" name=""/>
+        <p:cNvGrpSpPr/>
+        <p:nvPr/>
+      </p:nvGrpSpPr>
+      <p:grpSpPr/>
+      <p:sp>
+        <p:nvSpPr>
+          <p:cNvPr id="2" name="TextBox 1"/>
+          <p:cNvSpPr txBox="1"/>
+          <p:nvPr/>
+        </p:nvSpPr>
+        <p:spPr>
+          <a:xfrm>
+            <a:off x="548640" y="457200"/>
+            <a:ext cx="8046720" cy="914400"/>
+          </a:xfrm>
+          <a:prstGeom prst="rect">
+            <a:avLst/>
+          </a:prstGeom>
+          <a:noFill/>
+        </p:spPr>
+        <p:txBody>
+          <a:bodyPr wrap="square">
+            <a:spAutoFit/>
+          </a:bodyPr>
+          <a:lstStyle/>
+          <a:p>
+            <a:r>
+              <a:rPr sz="3000" b="1">
+                <a:solidFill>
+                  <a:srgbClr val="1A3A4A"/>
+                </a:solidFill>
+                <a:latin typeface="Georgia"/>
+              </a:rPr>
+              <a:t>Wie es weitergeht</a:t>
+            </a:r>
+          </a:p>
+        </p:txBody>
+      </p:sp>
+      <p:sp>
+        <p:nvSpPr>
+          <p:cNvPr id="3" name="TextBox 2"/>
+          <p:cNvSpPr txBox="1"/>
+          <p:nvPr/>
+        </p:nvSpPr>
+        <p:spPr>
+          <a:xfrm>
+            <a:off x="548640" y="1417320"/>
+            <a:ext cx="8046720" cy="3154680"/>
+          </a:xfrm>
+          <a:prstGeom prst="rect">
+            <a:avLst/>
+          </a:prstGeom>
+          <a:noFill/>
+        </p:spPr>
+        <p:txBody>
+          <a:bodyPr wrap="square">
+            <a:spAutoFit/>
+          </a:bodyPr>
+          <a:lstStyle/>
+          <a:p>
+            <a:pPr>
+              <a:spcAft>
+                <a:spcPts val="1000"/>
+              </a:spcAft>
+            </a:pPr>
+            <a:r>
+              <a:rPr sz="1600" b="1">
+                <a:solidFill>
+                  <a:srgbClr val="12828C"/>
+                </a:solidFill>
+                <a:latin typeface="Calibri"/>
+              </a:rPr>
+              <a:t>✓  </a:t>
+            </a:r>
+            <a:r>
+              <a:rPr sz="1600" b="0">
+                <a:solidFill>
+                  <a:srgbClr val="2C3E50"/>
+                </a:solidFill>
+                <a:latin typeface="Calibri"/>
+              </a:rPr>
+              <a:t>Zwei Calls im Monat — ein Thema mit euren Fragen, einer nur für Fragen</a:t>
+            </a:r>
+          </a:p>
+          <a:p>
+            <a:pPr>
+              <a:spcAft>
+                <a:spcPts val="1000"/>
+              </a:spcAft>
+            </a:pPr>
+            <a:r>
+              <a:rPr sz="1600" b="1">
+                <a:solidFill>
+                  <a:srgbClr val="12828C"/>
+                </a:solidFill>
+                <a:latin typeface="Calibri"/>
+              </a:rPr>
+              <a:t>✓  </a:t>
+            </a:r>
+            <a:r>
+              <a:rPr sz="1600" b="0">
+                <a:solidFill>
+                  <a:srgbClr val="2C3E50"/>
+                </a:solidFill>
+                <a:latin typeface="Calibri"/>
+              </a:rPr>
+              <a:t>Alles wird aufgezeichnet und liegt in der Academy</a:t>
+            </a:r>
+          </a:p>
+          <a:p>
+            <a:pPr>
+              <a:spcAft>
+                <a:spcPts val="1000"/>
+              </a:spcAft>
+            </a:pPr>
+            <a:r>
+              <a:rPr sz="1600" b="1">
+                <a:solidFill>
+                  <a:srgbClr val="12828C"/>
+                </a:solidFill>
+                <a:latin typeface="Calibri"/>
+              </a:rPr>
+              <a:t>✓  </a:t>
+            </a:r>
+            <a:r>
+              <a:rPr sz="1600" b="0">
+                <a:solidFill>
+                  <a:srgbClr val="2C3E50"/>
+                </a:solidFill>
+                <a:latin typeface="Calibri"/>
+              </a:rPr>
+              <a:t>Zwischendurch: Fragen-Bereich, ich bin Di &amp; Do drin</a:t>
+            </a:r>
+          </a:p>
+          <a:p>
+            <a:pPr>
+              <a:spcAft>
+                <a:spcPts val="1000"/>
+              </a:spcAft>
+            </a:pPr>
+            <a:r>
+              <a:rPr sz="1600" b="1">
+                <a:solidFill>
+                  <a:srgbClr val="12828C"/>
+                </a:solidFill>
+                <a:latin typeface="Calibri"/>
+              </a:rPr>
+              <a:t>✓  </a:t>
+            </a:r>
+            <a:r>
+              <a:rPr sz="1600" b="0">
+                <a:solidFill>
+                  <a:srgbClr val="2C3E50"/>
+                </a:solidFill>
+                <a:latin typeface="Calibri"/>
+              </a:rPr>
+              <a:t>Nächster Themen-Call: deine vier Wochen — und dein Thema</a:t>
+            </a:r>
+          </a:p>
+        </p:txBody>
+      </p:sp>
+      <p:sp>
+        <p:nvSpPr>
+          <p:cNvPr id="4" name="TextBox 3"/>
+          <p:cNvSpPr txBox="1"/>
+          <p:nvPr/>
+        </p:nvSpPr>
+        <p:spPr>
+          <a:xfrm>
+            <a:off x="457200" y="4754880"/>
+            <a:ext cx="5486400" cy="274320"/>
+          </a:xfrm>
+          <a:prstGeom prst="rect">
+            <a:avLst/>
+          </a:prstGeom>
+          <a:noFill/>
+        </p:spPr>
+        <p:txBody>
+          <a:bodyPr wrap="square">
+            <a:spAutoFit/>
+          </a:bodyPr>
+          <a:lstStyle/>
+          <a:p>
+            <a:r>
+              <a:rPr sz="900" b="0">
+                <a:solidFill>
+                  <a:srgbClr val="7A8A95"/>
+                </a:solidFill>
+                <a:latin typeface="Calibri"/>
+              </a:rPr>
+              <a:t>MBA · Umsetzerinnen-Call 1 · Dranbleiben &amp; Konsistenz</a:t>
+            </a:r>
+          </a:p>
+        </p:txBody>
+      </p:sp>
+      <p:sp>
+        <p:nvSpPr>
+          <p:cNvPr id="5" name="TextBox 4"/>
+          <p:cNvSpPr txBox="1"/>
+          <p:nvPr/>
+        </p:nvSpPr>
+        <p:spPr>
+          <a:xfrm>
+            <a:off x="6400800" y="4754880"/>
+            <a:ext cx="2286000" cy="274320"/>
+          </a:xfrm>
+          <a:prstGeom prst="rect">
+            <a:avLst/>
+          </a:prstGeom>
+          <a:noFill/>
+        </p:spPr>
+        <p:txBody>
+          <a:bodyPr wrap="square">
+            <a:spAutoFit/>
+          </a:bodyPr>
+          <a:lstStyle/>
+          <a:p>
+            <a:pPr algn="r"/>
+            <a:r>
+              <a:rPr sz="900" b="0">
+                <a:solidFill>
+                  <a:srgbClr val="7A8A95"/>
+                </a:solidFill>
+                <a:latin typeface="Calibri"/>
+              </a:rPr>
+              <a:t>Mum Life Balance</a:t>
+            </a:r>
+          </a:p>
+        </p:txBody>
+      </p:sp>
+    </p:spTree>
+  </p:cSld>
+  <p:clrMapOvr>
+    <a:masterClrMapping/>
+  </p:clrMapOvr>
+</p:sld>
+</file>
+
 <file path=ppt/slides/slide3.xml><?xml version="1.0" encoding="utf-8"?>
 <p:sld xmlns:a="http://schemas.openxmlformats.org/drawingml/2006/main" xmlns:p="http://schemas.openxmlformats.org/presentationml/2006/main" xmlns:r="http://schemas.openxmlformats.org/officeDocument/2006/relationships">
   <p:cSld>
@@ -9450,7 +10076,7 @@
           <a:p>
             <a:pPr>
               <a:spcAft>
-                <a:spcPts val="1000"/>
+                <a:spcPts val="100"/>
               </a:spcAft>
             </a:pPr>
             <a:r>
@@ -9479,13 +10105,13 @@
               </a:spcAft>
             </a:pPr>
             <a:r>
-              <a:rPr sz="1600" b="1">
-                <a:solidFill>
-                  <a:srgbClr val="12828C"/>
-                </a:solidFill>
-                <a:latin typeface="Calibri"/>
-              </a:rPr>
-              <a:t>✓  </a:t>
+              <a:rPr sz="1600" b="0">
+                <a:solidFill>
+                  <a:srgbClr val="2C3E50"/>
+                </a:solidFill>
+                <a:latin typeface="Calibri"/>
+              </a:rPr>
+              <a:t>      </a:t>
             </a:r>
             <a:r>
               <a:rPr sz="1600" b="0">
